--- a/semaine_07/420905_semaine7.pptx
+++ b/semaine_07/420905_semaine7.pptx
@@ -1828,7 +1828,7 @@
           <a:p>
             <a:fld id="{CFA36C02-C10D-4F70-ADA5-0F3523AD6F2E}" type="datetimeFigureOut">
               <a:rPr lang="fr-CA" smtClean="0"/>
-              <a:t>2022-10-05</a:t>
+              <a:t>2022-10-06</a:t>
             </a:fld>
             <a:endParaRPr lang="fr-CA"/>
           </a:p>
@@ -4950,6 +4950,75 @@
             </a:r>
           </a:p>
           <a:p>
+            <a:pPr lvl="2"/>
+            <a:r>
+              <a:rPr lang="fr-CA" sz="1800" dirty="0">
+                <a:cs typeface="Courier New" panose="02070309020205020404" pitchFamily="49" charset="0"/>
+              </a:rPr>
+              <a:t> </a:t>
+            </a:r>
+            <a:r>
+              <a:rPr lang="fr-CA" sz="1800" b="1" dirty="0">
+                <a:solidFill>
+                  <a:schemeClr val="tx1"/>
+                </a:solidFill>
+                <a:latin typeface="Courier New" panose="02070309020205020404" pitchFamily="49" charset="0"/>
+                <a:cs typeface="Courier New" panose="02070309020205020404" pitchFamily="49" charset="0"/>
+              </a:rPr>
+              <a:t>.</a:t>
+            </a:r>
+            <a:r>
+              <a:rPr lang="fr-CA" sz="1800" b="1" dirty="0" err="1">
+                <a:solidFill>
+                  <a:srgbClr val="797CDE"/>
+                </a:solidFill>
+                <a:latin typeface="Courier New" panose="02070309020205020404" pitchFamily="49" charset="0"/>
+                <a:cs typeface="Courier New" panose="02070309020205020404" pitchFamily="49" charset="0"/>
+              </a:rPr>
+              <a:t>remove</a:t>
+            </a:r>
+            <a:r>
+              <a:rPr lang="fr-CA" sz="1800" b="1" dirty="0" err="1">
+                <a:solidFill>
+                  <a:schemeClr val="tx1"/>
+                </a:solidFill>
+                <a:latin typeface="Courier New" panose="02070309020205020404" pitchFamily="49" charset="0"/>
+                <a:cs typeface="Courier New" panose="02070309020205020404" pitchFamily="49" charset="0"/>
+              </a:rPr>
+              <a:t>Attribute</a:t>
+            </a:r>
+            <a:r>
+              <a:rPr lang="fr-CA" sz="1800" b="1" dirty="0">
+                <a:solidFill>
+                  <a:schemeClr val="tx1"/>
+                </a:solidFill>
+                <a:latin typeface="Courier New" panose="02070309020205020404" pitchFamily="49" charset="0"/>
+                <a:cs typeface="Courier New" panose="02070309020205020404" pitchFamily="49" charset="0"/>
+              </a:rPr>
+              <a:t>("</a:t>
+            </a:r>
+            <a:r>
+              <a:rPr lang="fr-CA" sz="1800" b="1" dirty="0">
+                <a:solidFill>
+                  <a:schemeClr val="accent6"/>
+                </a:solidFill>
+                <a:latin typeface="Courier New" panose="02070309020205020404" pitchFamily="49" charset="0"/>
+                <a:cs typeface="Courier New" panose="02070309020205020404" pitchFamily="49" charset="0"/>
+              </a:rPr>
+              <a:t>attribut</a:t>
+            </a:r>
+            <a:r>
+              <a:rPr lang="fr-CA" sz="1800" b="1" dirty="0">
+                <a:solidFill>
+                  <a:schemeClr val="tx1"/>
+                </a:solidFill>
+                <a:latin typeface="Courier New" panose="02070309020205020404" pitchFamily="49" charset="0"/>
+                <a:cs typeface="Courier New" panose="02070309020205020404" pitchFamily="49" charset="0"/>
+              </a:rPr>
+              <a:t>")</a:t>
+            </a:r>
+          </a:p>
+          <a:p>
             <a:pPr marL="457200" lvl="1" indent="0">
               <a:buNone/>
             </a:pPr>
@@ -5462,6 +5531,75 @@
                 <a:cs typeface="Courier New" panose="02070309020205020404" pitchFamily="49" charset="0"/>
               </a:rPr>
               <a:t>get</a:t>
+            </a:r>
+            <a:r>
+              <a:rPr lang="fr-CA" sz="1800" b="1" dirty="0" err="1">
+                <a:solidFill>
+                  <a:schemeClr val="tx1"/>
+                </a:solidFill>
+                <a:latin typeface="Courier New" panose="02070309020205020404" pitchFamily="49" charset="0"/>
+                <a:cs typeface="Courier New" panose="02070309020205020404" pitchFamily="49" charset="0"/>
+              </a:rPr>
+              <a:t>Attribute</a:t>
+            </a:r>
+            <a:r>
+              <a:rPr lang="fr-CA" sz="1800" b="1" dirty="0">
+                <a:solidFill>
+                  <a:schemeClr val="tx1"/>
+                </a:solidFill>
+                <a:latin typeface="Courier New" panose="02070309020205020404" pitchFamily="49" charset="0"/>
+                <a:cs typeface="Courier New" panose="02070309020205020404" pitchFamily="49" charset="0"/>
+              </a:rPr>
+              <a:t>("</a:t>
+            </a:r>
+            <a:r>
+              <a:rPr lang="fr-CA" sz="1800" b="1" dirty="0">
+                <a:solidFill>
+                  <a:schemeClr val="accent6"/>
+                </a:solidFill>
+                <a:latin typeface="Courier New" panose="02070309020205020404" pitchFamily="49" charset="0"/>
+                <a:cs typeface="Courier New" panose="02070309020205020404" pitchFamily="49" charset="0"/>
+              </a:rPr>
+              <a:t>attribut</a:t>
+            </a:r>
+            <a:r>
+              <a:rPr lang="fr-CA" sz="1800" b="1" dirty="0">
+                <a:solidFill>
+                  <a:schemeClr val="tx1"/>
+                </a:solidFill>
+                <a:latin typeface="Courier New" panose="02070309020205020404" pitchFamily="49" charset="0"/>
+                <a:cs typeface="Courier New" panose="02070309020205020404" pitchFamily="49" charset="0"/>
+              </a:rPr>
+              <a:t>")</a:t>
+            </a:r>
+          </a:p>
+          <a:p>
+            <a:pPr lvl="2"/>
+            <a:r>
+              <a:rPr lang="fr-CA" sz="1800" dirty="0">
+                <a:cs typeface="Courier New" panose="02070309020205020404" pitchFamily="49" charset="0"/>
+              </a:rPr>
+              <a:t> </a:t>
+            </a:r>
+            <a:r>
+              <a:rPr lang="fr-CA" sz="1800" b="1" dirty="0" err="1">
+                <a:solidFill>
+                  <a:schemeClr val="tx1"/>
+                </a:solidFill>
+                <a:latin typeface="Courier New" panose="02070309020205020404" pitchFamily="49" charset="0"/>
+                <a:cs typeface="Courier New" panose="02070309020205020404" pitchFamily="49" charset="0"/>
+              </a:rPr>
+              <a:t>this.</a:t>
+            </a:r>
+            <a:r>
+              <a:rPr lang="fr-CA" sz="1800" b="1" dirty="0" err="1">
+                <a:solidFill>
+                  <a:srgbClr val="797CDE"/>
+                </a:solidFill>
+                <a:latin typeface="Courier New" panose="02070309020205020404" pitchFamily="49" charset="0"/>
+                <a:cs typeface="Courier New" panose="02070309020205020404" pitchFamily="49" charset="0"/>
+              </a:rPr>
+              <a:t>remove</a:t>
             </a:r>
             <a:r>
               <a:rPr lang="fr-CA" sz="1800" b="1" dirty="0" err="1">
@@ -15127,18 +15265,18 @@
 </file>
 
 <file path=customXml/item1.xml><?xml version="1.0" encoding="utf-8"?>
-<p:properties xmlns:p="http://schemas.microsoft.com/office/2006/metadata/properties" xmlns:xsi="http://www.w3.org/2001/XMLSchema-instance" xmlns:pc="http://schemas.microsoft.com/office/infopath/2007/PartnerControls">
-  <documentManagement/>
-</p:properties>
-</file>
-
-<file path=customXml/item2.xml><?xml version="1.0" encoding="utf-8"?>
 <?mso-contentType ?>
 <FormTemplates xmlns="http://schemas.microsoft.com/sharepoint/v3/contenttype/forms">
   <Display>DocumentLibraryForm</Display>
   <Edit>DocumentLibraryForm</Edit>
   <New>DocumentLibraryForm</New>
 </FormTemplates>
+</file>
+
+<file path=customXml/item2.xml><?xml version="1.0" encoding="utf-8"?>
+<p:properties xmlns:p="http://schemas.microsoft.com/office/2006/metadata/properties" xmlns:xsi="http://www.w3.org/2001/XMLSchema-instance" xmlns:pc="http://schemas.microsoft.com/office/infopath/2007/PartnerControls">
+  <documentManagement/>
+</p:properties>
 </file>
 
 <file path=customXml/item3.xml><?xml version="1.0" encoding="utf-8"?>
@@ -15320,18 +15458,18 @@
 </file>
 
 <file path=customXml/itemProps1.xml><?xml version="1.0" encoding="utf-8"?>
-<ds:datastoreItem xmlns:ds="http://schemas.openxmlformats.org/officeDocument/2006/customXml" ds:itemID="{6370B228-6797-4658-8598-2B42192FD9A5}">
+<ds:datastoreItem xmlns:ds="http://schemas.openxmlformats.org/officeDocument/2006/customXml" ds:itemID="{CCE3F59F-8B7A-4EC2-8311-A564B741F14C}">
   <ds:schemaRefs>
-    <ds:schemaRef ds:uri="http://schemas.microsoft.com/office/2006/metadata/properties"/>
-    <ds:schemaRef ds:uri="http://schemas.microsoft.com/office/infopath/2007/PartnerControls"/>
+    <ds:schemaRef ds:uri="http://schemas.microsoft.com/sharepoint/v3/contenttype/forms"/>
   </ds:schemaRefs>
 </ds:datastoreItem>
 </file>
 
 <file path=customXml/itemProps2.xml><?xml version="1.0" encoding="utf-8"?>
-<ds:datastoreItem xmlns:ds="http://schemas.openxmlformats.org/officeDocument/2006/customXml" ds:itemID="{CCE3F59F-8B7A-4EC2-8311-A564B741F14C}">
+<ds:datastoreItem xmlns:ds="http://schemas.openxmlformats.org/officeDocument/2006/customXml" ds:itemID="{6370B228-6797-4658-8598-2B42192FD9A5}">
   <ds:schemaRefs>
-    <ds:schemaRef ds:uri="http://schemas.microsoft.com/sharepoint/v3/contenttype/forms"/>
+    <ds:schemaRef ds:uri="http://schemas.microsoft.com/office/2006/metadata/properties"/>
+    <ds:schemaRef ds:uri="http://schemas.microsoft.com/office/infopath/2007/PartnerControls"/>
   </ds:schemaRefs>
 </ds:datastoreItem>
 </file>

--- a/semaine_07/420905_semaine7.pptx
+++ b/semaine_07/420905_semaine7.pptx
@@ -12663,10 +12663,10 @@
       </p:sp>
       <p:pic>
         <p:nvPicPr>
-          <p:cNvPr id="6" name="Image 5">
-            <a:extLst>
-              <a:ext uri="{FF2B5EF4-FFF2-40B4-BE49-F238E27FC236}">
-                <a16:creationId xmlns:a16="http://schemas.microsoft.com/office/drawing/2014/main" id="{7E9A8777-2014-43C6-9CBA-0F8D0168A709}"/>
+          <p:cNvPr id="18" name="Image 17">
+            <a:extLst>
+              <a:ext uri="{FF2B5EF4-FFF2-40B4-BE49-F238E27FC236}">
+                <a16:creationId xmlns:a16="http://schemas.microsoft.com/office/drawing/2014/main" id="{09FEFF77-08B5-434B-A393-36D89EAC1473}"/>
               </a:ext>
             </a:extLst>
           </p:cNvPr>
@@ -12683,25 +12683,20 @@
         </p:blipFill>
         <p:spPr>
           <a:xfrm>
-            <a:off x="3461037" y="2145821"/>
-            <a:ext cx="5266325" cy="1147651"/>
+            <a:off x="1864105" y="3576879"/>
+            <a:ext cx="8460188" cy="668207"/>
           </a:xfrm>
           <a:prstGeom prst="rect">
             <a:avLst/>
           </a:prstGeom>
-          <a:ln w="38100">
-            <a:solidFill>
-              <a:srgbClr val="739CD1"/>
-            </a:solidFill>
-          </a:ln>
         </p:spPr>
       </p:pic>
       <p:pic>
         <p:nvPicPr>
-          <p:cNvPr id="18" name="Image 17">
-            <a:extLst>
-              <a:ext uri="{FF2B5EF4-FFF2-40B4-BE49-F238E27FC236}">
-                <a16:creationId xmlns:a16="http://schemas.microsoft.com/office/drawing/2014/main" id="{09FEFF77-08B5-434B-A393-36D89EAC1473}"/>
+          <p:cNvPr id="20" name="Image 19">
+            <a:extLst>
+              <a:ext uri="{FF2B5EF4-FFF2-40B4-BE49-F238E27FC236}">
+                <a16:creationId xmlns:a16="http://schemas.microsoft.com/office/drawing/2014/main" id="{3E66F0F3-6657-452D-B634-09969CD937CE}"/>
               </a:ext>
             </a:extLst>
           </p:cNvPr>
@@ -12712,36 +12707,6 @@
         </p:nvPicPr>
         <p:blipFill>
           <a:blip r:embed="rId3"/>
-          <a:stretch>
-            <a:fillRect/>
-          </a:stretch>
-        </p:blipFill>
-        <p:spPr>
-          <a:xfrm>
-            <a:off x="1864105" y="3576879"/>
-            <a:ext cx="8460188" cy="668207"/>
-          </a:xfrm>
-          <a:prstGeom prst="rect">
-            <a:avLst/>
-          </a:prstGeom>
-        </p:spPr>
-      </p:pic>
-      <p:pic>
-        <p:nvPicPr>
-          <p:cNvPr id="20" name="Image 19">
-            <a:extLst>
-              <a:ext uri="{FF2B5EF4-FFF2-40B4-BE49-F238E27FC236}">
-                <a16:creationId xmlns:a16="http://schemas.microsoft.com/office/drawing/2014/main" id="{3E66F0F3-6657-452D-B634-09969CD937CE}"/>
-              </a:ext>
-            </a:extLst>
-          </p:cNvPr>
-          <p:cNvPicPr>
-            <a:picLocks noChangeAspect="1"/>
-          </p:cNvPicPr>
-          <p:nvPr/>
-        </p:nvPicPr>
-        <p:blipFill>
-          <a:blip r:embed="rId4"/>
           <a:stretch>
             <a:fillRect/>
           </a:stretch>
@@ -12860,6 +12825,36 @@
           </a:p>
         </p:txBody>
       </p:sp>
+      <p:pic>
+        <p:nvPicPr>
+          <p:cNvPr id="8" name="Image 7">
+            <a:extLst>
+              <a:ext uri="{FF2B5EF4-FFF2-40B4-BE49-F238E27FC236}">
+                <a16:creationId xmlns:a16="http://schemas.microsoft.com/office/drawing/2014/main" id="{30CA3717-9DA6-C6DD-384B-63E3520D4437}"/>
+              </a:ext>
+            </a:extLst>
+          </p:cNvPr>
+          <p:cNvPicPr>
+            <a:picLocks noChangeAspect="1"/>
+          </p:cNvPicPr>
+          <p:nvPr/>
+        </p:nvPicPr>
+        <p:blipFill>
+          <a:blip r:embed="rId4"/>
+          <a:stretch>
+            <a:fillRect/>
+          </a:stretch>
+        </p:blipFill>
+        <p:spPr>
+          <a:xfrm>
+            <a:off x="2207999" y="2332581"/>
+            <a:ext cx="7772400" cy="908916"/>
+          </a:xfrm>
+          <a:prstGeom prst="rect">
+            <a:avLst/>
+          </a:prstGeom>
+        </p:spPr>
+      </p:pic>
     </p:spTree>
     <p:extLst>
       <p:ext uri="{BB962C8B-B14F-4D97-AF65-F5344CB8AC3E}">
@@ -13190,10 +13185,10 @@
       </p:sp>
       <p:pic>
         <p:nvPicPr>
-          <p:cNvPr id="6" name="Image 5">
-            <a:extLst>
-              <a:ext uri="{FF2B5EF4-FFF2-40B4-BE49-F238E27FC236}">
-                <a16:creationId xmlns:a16="http://schemas.microsoft.com/office/drawing/2014/main" id="{29114E41-C6E0-4C09-9318-B615239FF819}"/>
+          <p:cNvPr id="12" name="Image 11">
+            <a:extLst>
+              <a:ext uri="{FF2B5EF4-FFF2-40B4-BE49-F238E27FC236}">
+                <a16:creationId xmlns:a16="http://schemas.microsoft.com/office/drawing/2014/main" id="{055C2421-48C4-4745-AC0E-866DA443B135}"/>
               </a:ext>
             </a:extLst>
           </p:cNvPr>
@@ -13204,41 +13199,6 @@
         </p:nvPicPr>
         <p:blipFill>
           <a:blip r:embed="rId2"/>
-          <a:stretch>
-            <a:fillRect/>
-          </a:stretch>
-        </p:blipFill>
-        <p:spPr>
-          <a:xfrm>
-            <a:off x="3593435" y="2242232"/>
-            <a:ext cx="4934639" cy="1057423"/>
-          </a:xfrm>
-          <a:prstGeom prst="rect">
-            <a:avLst/>
-          </a:prstGeom>
-          <a:ln w="38100">
-            <a:solidFill>
-              <a:srgbClr val="739CD1"/>
-            </a:solidFill>
-          </a:ln>
-        </p:spPr>
-      </p:pic>
-      <p:pic>
-        <p:nvPicPr>
-          <p:cNvPr id="12" name="Image 11">
-            <a:extLst>
-              <a:ext uri="{FF2B5EF4-FFF2-40B4-BE49-F238E27FC236}">
-                <a16:creationId xmlns:a16="http://schemas.microsoft.com/office/drawing/2014/main" id="{055C2421-48C4-4745-AC0E-866DA443B135}"/>
-              </a:ext>
-            </a:extLst>
-          </p:cNvPr>
-          <p:cNvPicPr>
-            <a:picLocks noChangeAspect="1"/>
-          </p:cNvPicPr>
-          <p:nvPr/>
-        </p:nvPicPr>
-        <p:blipFill>
-          <a:blip r:embed="rId3"/>
           <a:stretch>
             <a:fillRect/>
           </a:stretch>
@@ -13320,7 +13280,7 @@
           <p:nvPr/>
         </p:nvPicPr>
         <p:blipFill>
-          <a:blip r:embed="rId4"/>
+          <a:blip r:embed="rId3"/>
           <a:stretch>
             <a:fillRect/>
           </a:stretch>
@@ -13439,6 +13399,36 @@
           </a:p>
         </p:txBody>
       </p:sp>
+      <p:pic>
+        <p:nvPicPr>
+          <p:cNvPr id="4" name="Image 3">
+            <a:extLst>
+              <a:ext uri="{FF2B5EF4-FFF2-40B4-BE49-F238E27FC236}">
+                <a16:creationId xmlns:a16="http://schemas.microsoft.com/office/drawing/2014/main" id="{95594B56-7A3A-5459-8ECD-253CA6291744}"/>
+              </a:ext>
+            </a:extLst>
+          </p:cNvPr>
+          <p:cNvPicPr>
+            <a:picLocks noChangeAspect="1"/>
+          </p:cNvPicPr>
+          <p:nvPr/>
+        </p:nvPicPr>
+        <p:blipFill>
+          <a:blip r:embed="rId4"/>
+          <a:stretch>
+            <a:fillRect/>
+          </a:stretch>
+        </p:blipFill>
+        <p:spPr>
+          <a:xfrm>
+            <a:off x="2207999" y="2334745"/>
+            <a:ext cx="7772400" cy="908916"/>
+          </a:xfrm>
+          <a:prstGeom prst="rect">
+            <a:avLst/>
+          </a:prstGeom>
+        </p:spPr>
+      </p:pic>
     </p:spTree>
     <p:extLst>
       <p:ext uri="{BB962C8B-B14F-4D97-AF65-F5344CB8AC3E}">
@@ -13923,41 +13913,6 @@
           </a:p>
         </p:txBody>
       </p:sp>
-      <p:pic>
-        <p:nvPicPr>
-          <p:cNvPr id="18" name="Image 17">
-            <a:extLst>
-              <a:ext uri="{FF2B5EF4-FFF2-40B4-BE49-F238E27FC236}">
-                <a16:creationId xmlns:a16="http://schemas.microsoft.com/office/drawing/2014/main" id="{6B6184B2-B17D-4CB7-9184-065307497408}"/>
-              </a:ext>
-            </a:extLst>
-          </p:cNvPr>
-          <p:cNvPicPr>
-            <a:picLocks noChangeAspect="1"/>
-          </p:cNvPicPr>
-          <p:nvPr/>
-        </p:nvPicPr>
-        <p:blipFill>
-          <a:blip r:embed="rId5"/>
-          <a:stretch>
-            <a:fillRect/>
-          </a:stretch>
-        </p:blipFill>
-        <p:spPr>
-          <a:xfrm>
-            <a:off x="3162890" y="2511999"/>
-            <a:ext cx="5547020" cy="1209665"/>
-          </a:xfrm>
-          <a:prstGeom prst="rect">
-            <a:avLst/>
-          </a:prstGeom>
-          <a:ln w="38100">
-            <a:solidFill>
-              <a:srgbClr val="739CD1"/>
-            </a:solidFill>
-          </a:ln>
-        </p:spPr>
-      </p:pic>
       <p:sp>
         <p:nvSpPr>
           <p:cNvPr id="19" name="Rectangle 18">
@@ -14114,6 +14069,36 @@
           </a:p>
         </p:txBody>
       </p:sp>
+      <p:pic>
+        <p:nvPicPr>
+          <p:cNvPr id="6" name="Image 5">
+            <a:extLst>
+              <a:ext uri="{FF2B5EF4-FFF2-40B4-BE49-F238E27FC236}">
+                <a16:creationId xmlns:a16="http://schemas.microsoft.com/office/drawing/2014/main" id="{BB86AE34-FDD2-D9A3-69E4-32377037A4CE}"/>
+              </a:ext>
+            </a:extLst>
+          </p:cNvPr>
+          <p:cNvPicPr>
+            <a:picLocks noChangeAspect="1"/>
+          </p:cNvPicPr>
+          <p:nvPr/>
+        </p:nvPicPr>
+        <p:blipFill>
+          <a:blip r:embed="rId5"/>
+          <a:stretch>
+            <a:fillRect/>
+          </a:stretch>
+        </p:blipFill>
+        <p:spPr>
+          <a:xfrm>
+            <a:off x="2208000" y="2332032"/>
+            <a:ext cx="7772400" cy="908916"/>
+          </a:xfrm>
+          <a:prstGeom prst="rect">
+            <a:avLst/>
+          </a:prstGeom>
+        </p:spPr>
+      </p:pic>
     </p:spTree>
     <p:extLst>
       <p:ext uri="{BB962C8B-B14F-4D97-AF65-F5344CB8AC3E}">
@@ -15274,12 +15259,6 @@
 </file>
 
 <file path=customXml/item2.xml><?xml version="1.0" encoding="utf-8"?>
-<p:properties xmlns:p="http://schemas.microsoft.com/office/2006/metadata/properties" xmlns:xsi="http://www.w3.org/2001/XMLSchema-instance" xmlns:pc="http://schemas.microsoft.com/office/infopath/2007/PartnerControls">
-  <documentManagement/>
-</p:properties>
-</file>
-
-<file path=customXml/item3.xml><?xml version="1.0" encoding="utf-8"?>
 <ct:contentTypeSchema xmlns:ct="http://schemas.microsoft.com/office/2006/metadata/contentType" xmlns:ma="http://schemas.microsoft.com/office/2006/metadata/properties/metaAttributes" ct:_="" ma:_="" ma:contentTypeName="Document" ma:contentTypeID="0x01010062E8CCA7FB9EAE4D9797B5C1381037FC" ma:contentTypeVersion="9" ma:contentTypeDescription="Create a new document." ma:contentTypeScope="" ma:versionID="020e06b287671e86e91b3e1b12ab4816">
   <xsd:schema xmlns:xsd="http://www.w3.org/2001/XMLSchema" xmlns:xs="http://www.w3.org/2001/XMLSchema" xmlns:p="http://schemas.microsoft.com/office/2006/metadata/properties" xmlns:ns2="83ab252c-4429-4d3c-b354-a26bac7f17c4" targetNamespace="http://schemas.microsoft.com/office/2006/metadata/properties" ma:root="true" ma:fieldsID="a7531f0ded98428dc5aa0cd72d251711" ns2:_="">
     <xsd:import namespace="83ab252c-4429-4d3c-b354-a26bac7f17c4"/>
@@ -15457,6 +15436,12 @@
 </ct:contentTypeSchema>
 </file>
 
+<file path=customXml/item3.xml><?xml version="1.0" encoding="utf-8"?>
+<p:properties xmlns:p="http://schemas.microsoft.com/office/2006/metadata/properties" xmlns:xsi="http://www.w3.org/2001/XMLSchema-instance" xmlns:pc="http://schemas.microsoft.com/office/infopath/2007/PartnerControls">
+  <documentManagement/>
+</p:properties>
+</file>
+
 <file path=customXml/itemProps1.xml><?xml version="1.0" encoding="utf-8"?>
 <ds:datastoreItem xmlns:ds="http://schemas.openxmlformats.org/officeDocument/2006/customXml" ds:itemID="{CCE3F59F-8B7A-4EC2-8311-A564B741F14C}">
   <ds:schemaRefs>
@@ -15466,15 +15451,6 @@
 </file>
 
 <file path=customXml/itemProps2.xml><?xml version="1.0" encoding="utf-8"?>
-<ds:datastoreItem xmlns:ds="http://schemas.openxmlformats.org/officeDocument/2006/customXml" ds:itemID="{6370B228-6797-4658-8598-2B42192FD9A5}">
-  <ds:schemaRefs>
-    <ds:schemaRef ds:uri="http://schemas.microsoft.com/office/2006/metadata/properties"/>
-    <ds:schemaRef ds:uri="http://schemas.microsoft.com/office/infopath/2007/PartnerControls"/>
-  </ds:schemaRefs>
-</ds:datastoreItem>
-</file>
-
-<file path=customXml/itemProps3.xml><?xml version="1.0" encoding="utf-8"?>
 <ds:datastoreItem xmlns:ds="http://schemas.openxmlformats.org/officeDocument/2006/customXml" ds:itemID="{F00987DE-DDD6-4665-BEF3-EC8912D7F5EA}">
   <ds:schemaRefs>
     <ds:schemaRef ds:uri="http://schemas.microsoft.com/office/2006/metadata/contentType"/>
@@ -15490,4 +15466,13 @@
     <ds:schemaRef ds:uri="http://schemas.microsoft.com/internal/obd"/>
   </ds:schemaRefs>
 </ds:datastoreItem>
+</file>
+
+<file path=customXml/itemProps3.xml><?xml version="1.0" encoding="utf-8"?>
+<ds:datastoreItem xmlns:ds="http://schemas.openxmlformats.org/officeDocument/2006/customXml" ds:itemID="{6370B228-6797-4658-8598-2B42192FD9A5}">
+  <ds:schemaRefs>
+    <ds:schemaRef ds:uri="http://schemas.microsoft.com/office/2006/metadata/properties"/>
+    <ds:schemaRef ds:uri="http://schemas.microsoft.com/office/infopath/2007/PartnerControls"/>
+  </ds:schemaRefs>
+</ds:datastoreItem>
 </file>